--- a/pre/2025-1-22.pptx
+++ b/pre/2025-1-22.pptx
@@ -11941,31 +11941,19 @@
               <a:rPr lang="en-US" altLang="zh-CN" dirty="0">
                 <a:sym typeface="+mn-ea"/>
               </a:rPr>
-              <a:t>VGG/</a:t>
+              <a:t>VGG16/</a:t>
             </a:r>
             <a:r>
               <a:rPr lang="en-US" altLang="zh-CN" dirty="0" err="1">
                 <a:sym typeface="+mn-ea"/>
               </a:rPr>
-              <a:t>ResNet</a:t>
+              <a:t>ResNet50</a:t>
             </a:r>
             <a:r>
               <a:rPr lang="en-US" altLang="zh-CN" dirty="0">
                 <a:sym typeface="+mn-ea"/>
               </a:rPr>
-              <a:t>/</a:t>
-            </a:r>
-            <a:r>
-              <a:rPr lang="en-US" altLang="zh-CN" dirty="0" err="1">
-                <a:sym typeface="+mn-ea"/>
-              </a:rPr>
-              <a:t>wideResNet</a:t>
-            </a:r>
-            <a:r>
-              <a:rPr lang="en-US" altLang="zh-CN" dirty="0">
-                <a:sym typeface="+mn-ea"/>
-              </a:rPr>
-              <a:t>/VIT</a:t>
+              <a:t>/ViT</a:t>
             </a:r>
             <a:r>
               <a:rPr lang="zh-CN" altLang="en-US" dirty="0">
@@ -12041,7 +12029,7 @@
       </p:sp>
       <p:pic>
         <p:nvPicPr>
-          <p:cNvPr id="2" name="图片 1"/>
+          <p:cNvPr id="3" name="图片 2"/>
           <p:cNvPicPr>
             <a:picLocks noChangeAspect="1"/>
           </p:cNvPicPr>
@@ -12055,8 +12043,8 @@
         </p:blipFill>
         <p:spPr>
           <a:xfrm>
-            <a:off x="2510790" y="2595880"/>
-            <a:ext cx="6090920" cy="3429635"/>
+            <a:off x="3020695" y="2595880"/>
+            <a:ext cx="5610225" cy="2990850"/>
           </a:xfrm>
           <a:prstGeom prst="rect">
             <a:avLst/>
@@ -12422,7 +12410,7 @@
         </p:nvSpPr>
         <p:spPr>
           <a:xfrm>
-            <a:off x="442595" y="1341120"/>
+            <a:off x="431800" y="1341120"/>
             <a:ext cx="10592435" cy="368300"/>
           </a:xfrm>
           <a:prstGeom prst="rect">
@@ -12444,15 +12432,21 @@
               <a:rPr lang="zh-CN" altLang="en-US" dirty="0">
                 <a:sym typeface="+mn-ea"/>
               </a:rPr>
-              <a:t>对比</a:t>
+              <a:t>提出的基于输入扰动改进，对比</a:t>
             </a:r>
             <a:r>
               <a:rPr lang="en-US" altLang="zh-CN" dirty="0">
                 <a:sym typeface="+mn-ea"/>
               </a:rPr>
-              <a:t>Softmax,Ensemble,DDU,DDU+ip</a:t>
-            </a:r>
-            <a:endParaRPr lang="en-US" altLang="zh-CN" dirty="0">
+              <a:t>MSP,Ensemble,DDU</a:t>
+            </a:r>
+            <a:r>
+              <a:rPr lang="zh-CN" altLang="en-US" dirty="0">
+                <a:sym typeface="+mn-ea"/>
+              </a:rPr>
+              <a:t>等不确定性建模方法</a:t>
+            </a:r>
+            <a:endParaRPr lang="zh-CN" altLang="en-US" dirty="0">
               <a:sym typeface="+mn-ea"/>
             </a:endParaRPr>
           </a:p>
@@ -12466,7 +12460,7 @@
         </p:nvGrpSpPr>
         <p:grpSpPr>
           <a:xfrm>
-            <a:off x="8021320" y="1724025"/>
+            <a:off x="6952615" y="2042160"/>
             <a:ext cx="3723640" cy="4050665"/>
             <a:chOff x="2083" y="2928"/>
             <a:chExt cx="5864" cy="6379"/>
@@ -12523,7 +12517,7 @@
       </p:grpSp>
       <p:pic>
         <p:nvPicPr>
-          <p:cNvPr id="2" name="图片 1"/>
+          <p:cNvPr id="8" name="图片 7"/>
           <p:cNvPicPr>
             <a:picLocks noChangeAspect="1"/>
           </p:cNvPicPr>
@@ -12537,8 +12531,8 @@
         </p:blipFill>
         <p:spPr>
           <a:xfrm>
-            <a:off x="442595" y="2916555"/>
-            <a:ext cx="7646035" cy="2145665"/>
+            <a:off x="2219325" y="2042160"/>
+            <a:ext cx="4458335" cy="4116705"/>
           </a:xfrm>
           <a:prstGeom prst="rect">
             <a:avLst/>
